--- a/tests/fixtures/samples/ia-en-produccion.pptx
+++ b/tests/fixtures/samples/ia-en-produccion.pptx
@@ -646,7 +646,7 @@
           <a:lstStyle/>
           <a:p>
             <a:r>
-              <a:t>La optimización energética basada en IA ajusta consignas en tiempo real según demanda y condiciones. Ahorros típicos de cinco a quince por ciento reducen directamente las emisiones de alcance dos.</a:t>
+              <a:t>Los asistentes con IA generativa responden a los operarios a partir de manuales y procedimientos mediante RAG. Los modelos pequeños pueden ejecutarse cerca de la línea y cada respuesta cita sus fuentes.</a:t>
             </a:r>
           </a:p>
         </p:txBody>
@@ -3956,7 +3956,7 @@
           <a:lstStyle/>
           <a:p>
             <a:r>
-              <a:t>Optimización energética</a:t>
+              <a:t>Asistentes con IA generativa</a:t>
             </a:r>
           </a:p>
         </p:txBody>
@@ -3977,25 +3977,25 @@
           <a:lstStyle/>
           <a:p>
             <a:r>
-              <a:t>Modelos de consumo en tiempo real</a:t>
+              <a:t>Respuestas sobre manuales y procedimientos</a:t>
             </a:r>
           </a:p>
           <a:p>
             <a:pPr/>
             <a:r>
-              <a:t>Ajuste automático de consignas</a:t>
+              <a:t>Búsqueda RAG en documentación técnica</a:t>
             </a:r>
           </a:p>
           <a:p>
             <a:pPr/>
             <a:r>
-              <a:t>Ahorro 5-15% en energía</a:t>
+              <a:t>Modelos pequeños cerca de la línea</a:t>
             </a:r>
           </a:p>
           <a:p>
             <a:pPr/>
             <a:r>
-              <a:t>Reduce scope 2 directamente</a:t>
+              <a:t>Fuentes citadas en cada respuesta</a:t>
             </a:r>
           </a:p>
         </p:txBody>
